--- a/onboarding/presentaciones/ONB02_Como_vamos_a_trabajar_juntas.pptx
+++ b/onboarding/presentaciones/ONB02_Como_vamos_a_trabajar_juntas.pptx
@@ -783,7 +783,7 @@
             <a:r>
               <a:rPr lang="en-US" dirty="0"/>
               <a:t>También quiero que sepas que durante AT WORK no estás sola entre una sesión y la siguiente.
-Si te surge una duda, quieres compartir algo, necesitas feedback o simplemente quieres contarme una situación que pasó en tu trabajo, puedes hacerlo dentro de la comunidad de WhatsApp.
+Si te surge una duda, quieres compartir algo, necesitas feedback o simplemente quieres contarme una situación que pasó en tu trabajo, puedes hacerlo dentro de AT WORK Community, nuestra comunidad de WhatsApp.
 La comunidad va a ser nuestro espacio principal de comunicación durante el programa. Ahí puedes compartir prácticas, hacer preguntas, pedirme feedback, contar un avance o algo que aprendiste durante la semana.
 Si se trata de un tema administrativo o de algo que prefieres mantener en privado, ahí sí puedes escribirme directamente.
 Y cuando una situación necesita más contexto, análisis o trabajo en profundidad, la llevamos a nuestra sesión 1:1 para poder trabajarla bien.
@@ -4297,7 +4297,7 @@
                 <a:ea typeface="Source Serif Pro" pitchFamily="34" charset="-122"/>
                 <a:cs typeface="Source Serif Pro" pitchFamily="34" charset="-120"/>
               </a:rPr>
-              <a:t>Comunidad de WhatsApp</a:t>
+              <a:t>AT WORK Community</a:t>
             </a:r>
             <a:endParaRPr lang="en-US" sz="1700" dirty="0"/>
           </a:p>
@@ -4336,7 +4336,7 @@
                 <a:ea typeface="Open Sans" pitchFamily="34" charset="-122"/>
                 <a:cs typeface="Open Sans" pitchFamily="34" charset="-120"/>
               </a:rPr>
-              <a:t>nuestro espacio principal</a:t>
+              <a:t>en WhatsApp · nuestro espacio principal</a:t>
             </a:r>
             <a:endParaRPr lang="en-US" sz="1050" dirty="0"/>
           </a:p>
